--- a/outputs/sbi_parameter_maps_2026-09-18/presentation/X21_parameter_maps.pptx
+++ b/outputs/sbi_parameter_maps_2026-09-18/presentation/X21_parameter_maps.pptx
@@ -2130,219 +2130,167 @@
 </file>
 
 <file path=ppt/notesSlides/notesSlide4.xml><?xml version="1.0" encoding="utf-8"?>
-<p:notes xmlns:a="http://schemas.openxmlformats.org/drawingml/2006/main" xmlns:r="http://schemas.openxmlformats.org/officeDocument/2006/relationships" xmlns:p="http://schemas.openxmlformats.org/presentationml/2006/main">
-  <p:cSld>
-    <p:spTree>
-      <p:nvGrpSpPr>
-        <p:cNvPr id="1" name=""/>
-        <p:cNvGrpSpPr/>
-        <p:nvPr/>
-      </p:nvGrpSpPr>
-      <p:grpSpPr>
-        <a:xfrm>
-          <a:off x="0" y="0"/>
-          <a:ext cx="0" cy="0"/>
-          <a:chOff x="0" y="0"/>
-          <a:chExt cx="0" cy="0"/>
-        </a:xfrm>
-      </p:grpSpPr>
-      <p:sp>
-        <p:nvSpPr>
-          <p:cNvPr id="2" name="Slide Image Placeholder 1"/>
-          <p:cNvSpPr>
-            <a:spLocks noGrp="1" noRot="1" noChangeAspect="1"/>
-          </p:cNvSpPr>
-          <p:nvPr>
-            <p:ph type="sldImg"/>
-          </p:nvPr>
-        </p:nvSpPr>
-        <p:spPr/>
-      </p:sp>
-      <p:sp>
-        <p:nvSpPr>
-          <p:cNvPr id="3" name="Notes Placeholder 2"/>
-          <p:cNvSpPr>
-            <a:spLocks noGrp="1"/>
-          </p:cNvSpPr>
-          <p:nvPr>
-            <p:ph type="body" idx="1"/>
-          </p:nvPr>
-        </p:nvSpPr>
-        <p:spPr/>
-        <p:txBody>
-          <a:bodyPr/>
-          <a:lstStyle/>
-          <a:p>
-            <a:r>
-              <a:rPr dirty="0"/>
-              <a:t>To investigate why AN19 favors the acoustic baseline, I used the same 5,685 available responses for MFCC, STRF and both </a:t>
-            </a:r>
-            <a:r>
-              <a:rPr dirty="0" err="1"/>
-              <a:t>HuBERT</a:t>
-            </a:r>
-            <a:r>
-              <a:rPr dirty="0"/>
-              <a:t> Tr-24 representations. I calculated mean accuracy and mean negative distance for each condition by test-recording cell. This gives 574 cells covering 48 lexical words. A recording identifies a word produced by a particular test talker. I then correlated the two cell-level quantities, giving every cell equal weight.</a:t>
-            </a:r>
-          </a:p>
-          <a:p>
-            <a:endParaRPr dirty="0"/>
-          </a:p>
-          <a:p>
-            <a:r>
-              <a:rPr dirty="0"/>
-              <a:t>For the second group of bars, I subtracted each lexical word's mean from both negative distance and accuracy before calculating Pearson correlation. STRF falls from 0.456 to 0.198, while base Tr-24 falls from 0.440 to 0.339. FT changes from 0.364 to 0.362. MFCC falls from 0.376 to 0.249. This makes word-dependent variation a more specific candidate explanation for the baseline advantage than simply saying that acoustic features are predictive.</a:t>
-            </a:r>
-          </a:p>
-          <a:p>
-            <a:endParaRPr dirty="0"/>
-          </a:p>
-          <a:p>
-            <a:r>
-              <a:rPr dirty="0"/>
-              <a:t>The pattern remains when I remove word and condition effects together using an ordinary least-squares projection: correlations are 0.245 for MFCC, 0.154 for STRF, 0.323 for base Tr-24 and 0.319 for FT. This projection is a descriptive sensitivity calculation and does not refit the GLMM. In X21, excluding Talker-specific still gives raw correlations of 0.094 and 0.058 for the baselines, versus 0.283 and 0.284 for </a:t>
-            </a:r>
-            <a:r>
-              <a:rPr dirty="0" err="1"/>
-              <a:t>HuBERT</a:t>
-            </a:r>
-            <a:r>
-              <a:rPr dirty="0"/>
-              <a:t>. Excluding Control as well preserves that ordering.</a:t>
-            </a:r>
-          </a:p>
-          <a:p>
-            <a:endParaRPr dirty="0"/>
-          </a:p>
-          <a:p>
-            <a:r>
-              <a:rPr dirty="0"/>
-              <a:t>This finding does not establish a cause or a fraction of explained variance. Centering changes the comparison, cells share words and talkers, and there is no significance test here. Word duration, phonetic composition and recording characteristics are possible explanations that remain untested. The diagnostic also uses a different predictor and statistical summary from the historical z analysis on slide 1. It motivates a matched within/between-word model comparison rather than explaining that historical z gap by itself.</a:t>
-            </a:r>
-          </a:p>
-          <a:p>
-            <a:endParaRPr dirty="0"/>
-          </a:p>
-          <a:p>
-            <a:r>
-              <a:rPr dirty="0"/>
-              <a:t>Sources: </a:t>
-            </a:r>
-            <a:r>
-              <a:rPr dirty="0" err="1"/>
-              <a:t>cross_talker_generalization</a:t>
-            </a:r>
-            <a:r>
-              <a:rPr dirty="0"/>
-              <a:t>/artifacts/derived/AN19-AN19_acoustic-confirmatory-full-20260906-model-input.csv; AN19-AN19_hubert_base_tsne-confirmatory-tr24-20260906-model-input.csv; AN19-AN19_hubert_ft_tsne-confirmatory-tr24-20260906-model-input.csv. Descriptive calculations and input hashes: outputs/an19_baseline_explanation_2026-09-18/.build/analyze.py and </a:t>
-            </a:r>
-            <a:r>
-              <a:rPr dirty="0" err="1"/>
-              <a:t>evidence.json</a:t>
-            </a:r>
-            <a:r>
-              <a:rPr dirty="0"/>
-              <a:t>. Additional context: </a:t>
-            </a:r>
-            <a:r>
-              <a:rPr dirty="0" err="1"/>
-              <a:t>cross_talker_generalization</a:t>
-            </a:r>
-            <a:r>
-              <a:rPr dirty="0"/>
-              <a:t>/analysis_update_2026-09-18/AN19_BASELINE_EXPLANATION.md.</a:t>
-            </a:r>
-            <a:endParaRPr lang="en-US" dirty="0"/>
-          </a:p>
-          <a:p>
-            <a:endParaRPr lang="en-US" dirty="0"/>
-          </a:p>
-          <a:p>
-            <a:endParaRPr lang="en-US" dirty="0"/>
-          </a:p>
-          <a:p>
-            <a:r>
-              <a:rPr lang="zh-CN" altLang="zh-CN" dirty="0"/>
-              <a:t>这次我主要想解释，为什么 MFCC 和 STRF 在 AN19 上能够与 HuBERT 竞争，而在 X21 上，HuBERT 的优势更加明显。目前我找到了一条线索：AN19 中不同单词之间的差异，可能贡献了声学基线的较高表现。</a:t>
-            </a:r>
-          </a:p>
-          <a:p>
-            <a:r>
-              <a:rPr lang="zh-CN" altLang="zh-CN" dirty="0"/>
-              <a:t>具体来说，我先沿用现有的距离计算：对于一个测试说话人说出的某个单词，计算它与训练说话人说出的同一个单词之间的 DTW 距离，再对训练说话人取平均。这样，每个“测试说话人 × 单词 × 训练条件”组合都有一个距离，以及对应的人类平均正确率。</a:t>
-            </a:r>
-          </a:p>
-          <a:p>
-            <a:r>
-              <a:rPr lang="zh-CN" altLang="zh-CN" dirty="0"/>
-              <a:t>接下来，我想区分两个问题：一个是，有些单词总体上距离较小，也总体上更容易听懂；另一个是，对于同一个单词，当说话人或训练条件变化时，距离能否跟随正确率一起变化。为此，我把每个单词在不同测试说话人、不同条件下的距离取平均，也把这些记录的正确率取平均。然后，每条记录的距离减去这个单词的平均距离，正确率减去这个单词的平均正确率。每个组合的权重相同。</a:t>
-            </a:r>
-          </a:p>
-          <a:p>
-            <a:r>
-              <a:rPr lang="zh-CN" altLang="zh-CN" dirty="0"/>
-              <a:t>举个假设例子，如果 dog 的平均距离是 4、平均正确率是 70%，某条记录的距离是 2、正确率是 90%，减完以后就是距离 −2、正确率高出 20 个百分点。这表示，这条记录比 dog 自身的平均水平更相似，也更容易听懂。我对所有单词都这样处理，然后重新计算相关。实际计算中使用负距离，让数值越大表示越相似。</a:t>
-            </a:r>
-          </a:p>
-          <a:p>
-            <a:r>
-              <a:rPr lang="zh-CN" altLang="zh-CN" dirty="0"/>
-              <a:t>结果是，在 AN19 中，STRF 与正确率的相关从 </a:t>
-            </a:r>
-            <a:r>
-              <a:rPr lang="zh-CN" altLang="zh-CN" b="1" dirty="0"/>
-              <a:t>0.46 降到 0.20</a:t>
-            </a:r>
-            <a:r>
-              <a:rPr lang="zh-CN" altLang="zh-CN" dirty="0"/>
-              <a:t>，HuBERT-base 从 </a:t>
-            </a:r>
-            <a:r>
-              <a:rPr lang="zh-CN" altLang="zh-CN" b="1" dirty="0"/>
-              <a:t>0.44 降到 0.34</a:t>
-            </a:r>
-            <a:r>
-              <a:rPr lang="zh-CN" altLang="zh-CN" dirty="0"/>
-              <a:t>。去掉单词均值后，HuBERT 的相关更强。这提示，STRF 较高的整体相关，有一部分来自不同单词之间的差异。</a:t>
-            </a:r>
-          </a:p>
-          <a:p>
-            <a:r>
-              <a:rPr lang="zh-CN" altLang="zh-CN" dirty="0"/>
-              <a:t>目前，这还是一项描述性检查。它没有确定这些差异来自单词时长、语音构成还是录音特征，也没有直接证明它们造成了原图中的 z-value 排名。它给我们提供了一个更具体的解释方向：进一步检查，AN19 的声学基线是否特别擅长捕捉单词之间稳定的可懂度差异。</a:t>
-            </a:r>
-          </a:p>
-          <a:p>
-            <a:endParaRPr dirty="0"/>
-          </a:p>
-        </p:txBody>
-      </p:sp>
-      <p:sp>
-        <p:nvSpPr>
-          <p:cNvPr id="4" name="Slide Number Placeholder 3"/>
-          <p:cNvSpPr>
-            <a:spLocks noGrp="1"/>
-          </p:cNvSpPr>
-          <p:nvPr>
-            <p:ph type="sldNum" idx="5"/>
-          </p:nvPr>
-        </p:nvSpPr>
-        <p:spPr/>
-        <p:txBody>
-          <a:bodyPr/>
-          <a:lstStyle/>
-          <a:p>
-            <a:endParaRPr/>
-          </a:p>
-        </p:txBody>
-      </p:sp>
-    </p:spTree>
-  </p:cSld>
-  <p:clrMapOvr>
-    <a:masterClrMapping/>
-  </p:clrMapOvr>
-</p:notes>
+<ns0:notes xmlns:ns0="http://schemas.openxmlformats.org/presentationml/2006/main" xmlns:ns1="http://schemas.openxmlformats.org/drawingml/2006/main">
+  <ns0:cSld>
+    <ns0:spTree>
+      <ns0:nvGrpSpPr>
+        <ns0:cNvPr id="1" name=""/>
+        <ns0:cNvGrpSpPr/>
+        <ns0:nvPr/>
+      </ns0:nvGrpSpPr>
+      <ns0:grpSpPr>
+        <ns1:xfrm>
+          <ns1:off x="0" y="0"/>
+          <ns1:ext cx="0" cy="0"/>
+          <ns1:chOff x="0" y="0"/>
+          <ns1:chExt cx="0" cy="0"/>
+        </ns1:xfrm>
+      </ns0:grpSpPr>
+      <ns0:sp>
+        <ns0:nvSpPr>
+          <ns0:cNvPr id="2" name="Slide Image Placeholder 1"/>
+          <ns0:cNvSpPr>
+            <ns1:spLocks noGrp="1" noRot="1" noChangeAspect="1"/>
+          </ns0:cNvSpPr>
+          <ns0:nvPr>
+            <ns0:ph type="sldImg"/>
+          </ns0:nvPr>
+        </ns0:nvSpPr>
+        <ns0:spPr/>
+      </ns0:sp>
+      <ns0:sp>
+        <ns0:nvSpPr>
+          <ns0:cNvPr id="3" name="Notes Placeholder 2"/>
+          <ns0:cNvSpPr>
+            <ns1:spLocks noGrp="1"/>
+          </ns0:cNvSpPr>
+          <ns0:nvPr>
+            <ns0:ph type="body" idx="1"/>
+          </ns0:nvPr>
+        </ns0:nvSpPr>
+        <ns0:spPr/>
+        <ns0:txBody>
+          <ns1:bodyPr/>
+          <ns1:lstStyle/>
+          <ns1:p>
+            <ns1:r>
+              <ns1:rPr dirty="0"/>
+              <ns1:t>To investigate why AN19 favors the acoustic baseline, I used the same 5,685 available responses for MFCC, STRF and both </ns1:t>
+            </ns1:r>
+            <ns1:r>
+              <ns1:rPr dirty="0" err="1"/>
+              <ns1:t>HuBERT</ns1:t>
+            </ns1:r>
+            <ns1:r>
+              <ns1:rPr dirty="0"/>
+              <ns1:t> Tr-24 representations. I calculated mean accuracy and mean negative distance for each condition by test-recording cell. This gives 574 cells covering 48 lexical words. A recording identifies a word produced by a particular test talker. I then correlated the two cell-level quantities, giving every cell equal weight.</ns1:t>
+            </ns1:r>
+          </ns1:p>
+          <ns1:p>
+            <ns1:endParaRPr dirty="0"/>
+          </ns1:p>
+          <ns1:p>
+            <ns1:r>
+              <ns1:rPr dirty="0"/>
+              <ns1:t>For the second group of bars, I subtracted each lexical word's mean from both negative distance and accuracy before calculating Pearson correlation. STRF falls from 0.456 to 0.198, while base Tr-24 falls from 0.440 to 0.339. FT changes from 0.364 to 0.362. MFCC falls from 0.376 to 0.249. This makes word-dependent variation a more specific candidate explanation for the baseline advantage than simply saying that acoustic features are predictive.</ns1:t>
+            </ns1:r>
+          </ns1:p>
+          <ns1:p>
+            <ns1:endParaRPr dirty="0"/>
+          </ns1:p>
+          <ns1:p>
+            <ns1:r>
+              <ns1:rPr dirty="0"/>
+              <ns1:t>The pattern remains when I remove word and condition effects together using an ordinary least-squares projection: correlations are 0.245 for MFCC, 0.154 for STRF, 0.323 for base Tr-24 and 0.319 for FT. This projection is a descriptive sensitivity calculation and does not refit the GLMM. In X21, excluding Talker-specific still gives raw correlations of 0.094 and 0.058 for the baselines, versus 0.283 and 0.284 for </ns1:t>
+            </ns1:r>
+            <ns1:r>
+              <ns1:rPr dirty="0" err="1"/>
+              <ns1:t>HuBERT</ns1:t>
+            </ns1:r>
+            <ns1:r>
+              <ns1:rPr dirty="0"/>
+              <ns1:t>. Excluding Control as well preserves that ordering.</ns1:t>
+            </ns1:r>
+          </ns1:p>
+          <ns1:p>
+            <ns1:endParaRPr dirty="0"/>
+          </ns1:p>
+          <ns1:p>
+            <ns1:r>
+              <ns1:rPr dirty="0"/>
+              <ns1:t>This finding does not establish a cause or a fraction of explained variance. Centering changes the comparison, cells share words and talkers, and there is no significance test here. Word duration, phonetic composition and recording characteristics are possible explanations that remain untested. The diagnostic also uses a different predictor and statistical summary from the historical z analysis on slide 1. It motivates a matched within/between-word model comparison rather than explaining that historical z gap by itself.</ns1:t>
+            </ns1:r>
+          </ns1:p>
+          <ns1:p>
+            <ns1:endParaRPr dirty="0"/>
+          </ns1:p>
+          <ns1:p>
+            <ns1:r>
+              <ns1:rPr dirty="0"/>
+              <ns1:t>Sources: </ns1:t>
+            </ns1:r>
+            <ns1:r>
+              <ns1:rPr dirty="0" err="1"/>
+              <ns1:t>cross_talker_generalization</ns1:t>
+            </ns1:r>
+            <ns1:r>
+              <ns1:rPr dirty="0"/>
+              <ns1:t>/artifacts/derived/AN19-AN19_acoustic-confirmatory-full-20260906-model-input.csv; AN19-AN19_hubert_base_tsne-confirmatory-tr24-20260906-model-input.csv; AN19-AN19_hubert_ft_tsne-confirmatory-tr24-20260906-model-input.csv. Descriptive calculations and input hashes: outputs/an19_baseline_explanation_2026-09-18/.build/analyze.py and </ns1:t>
+            </ns1:r>
+            <ns1:r>
+              <ns1:rPr dirty="0" err="1"/>
+              <ns1:t>evidence.json</ns1:t>
+            </ns1:r>
+            <ns1:r>
+              <ns1:rPr dirty="0"/>
+              <ns1:t>. Additional context: </ns1:t>
+            </ns1:r>
+            <ns1:r>
+              <ns1:rPr dirty="0" err="1"/>
+              <ns1:t>cross_talker_generalization</ns1:t>
+            </ns1:r>
+            <ns1:r>
+              <ns1:rPr dirty="0"/>
+              <ns1:t>/analysis_update_2026-09-18/AN19_BASELINE_EXPLANATION.md.</ns1:t>
+            </ns1:r>
+            <ns1:endParaRPr lang="en-US" dirty="0"/>
+          </ns1:p>
+          <ns1:p>
+            <ns1:endParaRPr lang="en-US" dirty="0"/>
+          </ns1:p>
+          <ns1:p>
+            <ns1:endParaRPr lang="en-US" dirty="0"/>
+          </ns1:p>
+          <ns1:p>
+            <ns1:endParaRPr dirty="0"/>
+          </ns1:p>
+        </ns0:txBody>
+      </ns0:sp>
+      <ns0:sp>
+        <ns0:nvSpPr>
+          <ns0:cNvPr id="4" name="Slide Number Placeholder 3"/>
+          <ns0:cNvSpPr>
+            <ns1:spLocks noGrp="1"/>
+          </ns0:cNvSpPr>
+          <ns0:nvPr>
+            <ns0:ph type="sldNum" idx="5"/>
+          </ns0:nvPr>
+        </ns0:nvSpPr>
+        <ns0:spPr/>
+        <ns0:txBody>
+          <ns1:bodyPr/>
+          <ns1:lstStyle/>
+          <ns1:p>
+            <ns1:endParaRPr/>
+          </ns1:p>
+        </ns0:txBody>
+      </ns0:sp>
+    </ns0:spTree>
+  </ns0:cSld>
+  <ns0:clrMapOvr>
+    <ns1:masterClrMapping/>
+  </ns0:clrMapOvr>
+</ns0:notes>
 </file>
 
 <file path=ppt/notesSlides/sbi_added_notesSlide1.xml><?xml version="1.0" encoding="utf-8"?>
